--- a/build/02-distributed-dbs.pptx
+++ b/build/02-distributed-dbs.pptx
@@ -3517,8 +3517,8 @@
         </p:blipFill>
         <p:spPr bwMode="auto">
           <a:xfrm>
-            <a:off x="939800" y="1930400"/>
-            <a:ext cx="10629900" cy="3340100"/>
+            <a:off x="3441700" y="1600200"/>
+            <a:ext cx="5626100" cy="4013200"/>
           </a:xfrm>
           <a:prstGeom prst="rect">
             <a:avLst/>
@@ -3671,8 +3671,8 @@
         </p:blipFill>
         <p:spPr bwMode="auto">
           <a:xfrm>
-            <a:off x="5067300" y="1600200"/>
-            <a:ext cx="2387600" cy="4013200"/>
+            <a:off x="3886200" y="1600200"/>
+            <a:ext cx="4724400" cy="4013200"/>
           </a:xfrm>
           <a:prstGeom prst="rect">
             <a:avLst/>
@@ -3954,8 +3954,8 @@
         </p:blipFill>
         <p:spPr bwMode="auto">
           <a:xfrm>
-            <a:off x="939800" y="1689100"/>
-            <a:ext cx="10629900" cy="3835400"/>
+            <a:off x="2489200" y="1600200"/>
+            <a:ext cx="7531100" cy="4013200"/>
           </a:xfrm>
           <a:prstGeom prst="rect">
             <a:avLst/>
@@ -4470,8 +4470,8 @@
         </p:blipFill>
         <p:spPr bwMode="auto">
           <a:xfrm>
-            <a:off x="4635500" y="1409700"/>
-            <a:ext cx="6248400" cy="3848100"/>
+            <a:off x="4699000" y="1409700"/>
+            <a:ext cx="6134100" cy="3848100"/>
           </a:xfrm>
           <a:prstGeom prst="rect">
             <a:avLst/>
@@ -4808,8 +4808,8 @@
         </p:blipFill>
         <p:spPr bwMode="auto">
           <a:xfrm>
-            <a:off x="3733800" y="1600200"/>
-            <a:ext cx="5041900" cy="4013200"/>
+            <a:off x="4368800" y="1600200"/>
+            <a:ext cx="3759200" cy="4013200"/>
           </a:xfrm>
           <a:prstGeom prst="rect">
             <a:avLst/>
@@ -5515,8 +5515,8 @@
         </p:blipFill>
         <p:spPr bwMode="auto">
           <a:xfrm>
-            <a:off x="5448300" y="1600200"/>
-            <a:ext cx="1625600" cy="4013200"/>
+            <a:off x="4102100" y="1600200"/>
+            <a:ext cx="4305300" cy="4013200"/>
           </a:xfrm>
           <a:prstGeom prst="rect">
             <a:avLst/>
@@ -5882,8 +5882,8 @@
         </p:blipFill>
         <p:spPr bwMode="auto">
           <a:xfrm>
-            <a:off x="5969000" y="1409700"/>
-            <a:ext cx="3568700" cy="3848100"/>
+            <a:off x="6159500" y="1409700"/>
+            <a:ext cx="3200400" cy="3848100"/>
           </a:xfrm>
           <a:prstGeom prst="rect">
             <a:avLst/>
@@ -6036,8 +6036,8 @@
         </p:blipFill>
         <p:spPr bwMode="auto">
           <a:xfrm>
-            <a:off x="3048000" y="1600200"/>
-            <a:ext cx="6413500" cy="4013200"/>
+            <a:off x="3200400" y="1600200"/>
+            <a:ext cx="6096000" cy="4013200"/>
           </a:xfrm>
           <a:prstGeom prst="rect">
             <a:avLst/>
@@ -6326,8 +6326,8 @@
         </p:blipFill>
         <p:spPr bwMode="auto">
           <a:xfrm>
-            <a:off x="2882900" y="1600200"/>
-            <a:ext cx="6756400" cy="4013200"/>
+            <a:off x="939800" y="1714500"/>
+            <a:ext cx="10629900" cy="3797300"/>
           </a:xfrm>
           <a:prstGeom prst="rect">
             <a:avLst/>
@@ -7270,8 +7270,8 @@
         </p:blipFill>
         <p:spPr bwMode="auto">
           <a:xfrm>
-            <a:off x="7200900" y="1409700"/>
-            <a:ext cx="1117600" cy="3848100"/>
+            <a:off x="5486400" y="1409700"/>
+            <a:ext cx="4559300" cy="3848100"/>
           </a:xfrm>
           <a:prstGeom prst="rect">
             <a:avLst/>
@@ -7689,8 +7689,8 @@
         </p:blipFill>
         <p:spPr bwMode="auto">
           <a:xfrm>
-            <a:off x="5295900" y="1600200"/>
-            <a:ext cx="1930400" cy="4013200"/>
+            <a:off x="4102100" y="1600200"/>
+            <a:ext cx="4305300" cy="4013200"/>
           </a:xfrm>
           <a:prstGeom prst="rect">
             <a:avLst/>
@@ -7843,8 +7843,8 @@
         </p:blipFill>
         <p:spPr bwMode="auto">
           <a:xfrm>
-            <a:off x="1143000" y="1600200"/>
-            <a:ext cx="10223500" cy="4013200"/>
+            <a:off x="4114800" y="1600200"/>
+            <a:ext cx="4279900" cy="4013200"/>
           </a:xfrm>
           <a:prstGeom prst="rect">
             <a:avLst/>
@@ -8526,8 +8526,8 @@
         </p:blipFill>
         <p:spPr bwMode="auto">
           <a:xfrm>
-            <a:off x="3949700" y="2311400"/>
-            <a:ext cx="7620000" cy="2044700"/>
+            <a:off x="3949700" y="1841500"/>
+            <a:ext cx="7620000" cy="2971800"/>
           </a:xfrm>
           <a:prstGeom prst="rect">
             <a:avLst/>
@@ -9113,8 +9113,8 @@
         </p:blipFill>
         <p:spPr bwMode="auto">
           <a:xfrm>
-            <a:off x="939800" y="2590800"/>
-            <a:ext cx="10629900" cy="2044700"/>
+            <a:off x="2349500" y="1600200"/>
+            <a:ext cx="7797800" cy="4013200"/>
           </a:xfrm>
           <a:prstGeom prst="rect">
             <a:avLst/>
@@ -9947,8 +9947,8 @@
         </p:blipFill>
         <p:spPr bwMode="auto">
           <a:xfrm>
-            <a:off x="2921000" y="1600200"/>
-            <a:ext cx="6654800" cy="4013200"/>
+            <a:off x="3162300" y="1600200"/>
+            <a:ext cx="6184900" cy="4013200"/>
           </a:xfrm>
           <a:prstGeom prst="rect">
             <a:avLst/>
